--- a/presentacion/gymmanager_presentacion.pptx
+++ b/presentacion/gymmanager_presentacion.pptx
@@ -12,6 +12,9 @@
     <p:sldId id="260" r:id="rId11"/>
     <p:sldId id="261" r:id="rId12"/>
     <p:sldId id="262" r:id="rId13"/>
+    <p:sldId id="263" r:id="rId14"/>
+    <p:sldId id="264" r:id="rId15"/>
+    <p:sldId id="265" r:id="rId16"/>
   </p:sldIdLst>
   <p:sldSz cx="12191695" cy="6858000" type="screen4x3"/>
   <p:notesSz cx="6858000" cy="9144000"/>
@@ -3305,6 +3308,112 @@
 </p:sld>
 </file>
 
+<file path=ppt/slides/slide10.xml><?xml version="1.0" encoding="utf-8"?>
+<p:sld xmlns:a="http://schemas.openxmlformats.org/drawingml/2006/main" xmlns:p="http://schemas.openxmlformats.org/presentationml/2006/main" xmlns:r="http://schemas.openxmlformats.org/officeDocument/2006/relationships">
+  <p:cSld>
+    <p:bg>
+      <p:bgPr>
+        <a:solidFill>
+          <a:srgbClr val="0C162B"/>
+        </a:solidFill>
+        <a:effectLst/>
+      </p:bgPr>
+    </p:bg>
+    <p:spTree>
+      <p:nvGrpSpPr>
+        <p:cNvPr id="1" name=""/>
+        <p:cNvGrpSpPr/>
+        <p:nvPr/>
+      </p:nvGrpSpPr>
+      <p:grpSpPr/>
+      <p:sp>
+        <p:nvSpPr>
+          <p:cNvPr id="2" name="Title 1"/>
+          <p:cNvSpPr>
+            <a:spLocks noGrp="1"/>
+          </p:cNvSpPr>
+          <p:nvPr>
+            <p:ph type="title"/>
+          </p:nvPr>
+        </p:nvSpPr>
+        <p:spPr/>
+        <p:txBody>
+          <a:bodyPr/>
+          <a:lstStyle/>
+          <a:p>
+            <a:pPr>
+              <a:defRPr>
+                <a:solidFill>
+                  <a:srgbClr val="F472B6"/>
+                </a:solidFill>
+              </a:defRPr>
+            </a:pPr>
+            <a:r>
+              <a:t>6. Conclusión</a:t>
+            </a:r>
+          </a:p>
+        </p:txBody>
+      </p:sp>
+      <p:sp>
+        <p:nvSpPr>
+          <p:cNvPr id="3" name="Content Placeholder 2"/>
+          <p:cNvSpPr>
+            <a:spLocks noGrp="1"/>
+          </p:cNvSpPr>
+          <p:nvPr>
+            <p:ph idx="1"/>
+          </p:nvPr>
+        </p:nvSpPr>
+        <p:spPr/>
+        <p:txBody>
+          <a:bodyPr/>
+          <a:lstStyle/>
+          <a:p>
+            <a:pPr>
+              <a:defRPr sz="2000">
+                <a:solidFill>
+                  <a:srgbClr val="F8FAFC"/>
+                </a:solidFill>
+              </a:defRPr>
+            </a:pPr>
+            <a:r>
+              <a:t>GymManager es un ejemplo sencillo de cómo una idea real puede transformarse en una aplicación web.</a:t>
+            </a:r>
+          </a:p>
+          <a:p>
+            <a:pPr>
+              <a:defRPr sz="2000">
+                <a:solidFill>
+                  <a:srgbClr val="F8FAFC"/>
+                </a:solidFill>
+              </a:defRPr>
+            </a:pPr>
+            <a:r>
+              <a:t>Se combina lógica, diseño y organización de información.</a:t>
+            </a:r>
+          </a:p>
+          <a:p>
+            <a:pPr>
+              <a:defRPr sz="2000">
+                <a:solidFill>
+                  <a:srgbClr val="F8FAFC"/>
+                </a:solidFill>
+              </a:defRPr>
+            </a:pPr>
+            <a:r>
+              <a:t>Es una buena forma de comprender cómo se construyen proyectos de software.</a:t>
+            </a:r>
+          </a:p>
+        </p:txBody>
+      </p:sp>
+    </p:spTree>
+  </p:cSld>
+  <p:clrMapOvr>
+    <a:masterClrMapping/>
+  </p:clrMapOvr>
+</p:sld>
+</file>
+
 <file path=ppt/slides/slide2.xml><?xml version="1.0" encoding="utf-8"?>
 <p:sld xmlns:a="http://schemas.openxmlformats.org/drawingml/2006/main" xmlns:p="http://schemas.openxmlformats.org/presentationml/2006/main" xmlns:r="http://schemas.openxmlformats.org/officeDocument/2006/relationships">
   <p:cSld>
@@ -3712,7 +3821,7 @@
               </a:defRPr>
             </a:pPr>
             <a:r>
-              <a:t>4. Paso a paso: cómo funciona</a:t>
+              <a:t>4. Estructura del código</a:t>
             </a:r>
           </a:p>
         </p:txBody>
@@ -3733,50 +3842,62 @@
           <a:lstStyle/>
           <a:p>
             <a:pPr>
-              <a:defRPr sz="2000">
+              <a:defRPr sz="1900">
                 <a:solidFill>
                   <a:srgbClr val="F8FAFC"/>
                 </a:solidFill>
               </a:defRPr>
             </a:pPr>
             <a:r>
-              <a:t>1) El usuario entra a la aplicación.</a:t>
-            </a:r>
-          </a:p>
-          <a:p>
-            <a:pPr>
-              <a:defRPr sz="2000">
+              <a:t>app.py: prende la aplicación y define el puerto.</a:t>
+            </a:r>
+          </a:p>
+          <a:p>
+            <a:pPr>
+              <a:defRPr sz="1900">
                 <a:solidFill>
                   <a:srgbClr val="F8FAFC"/>
                 </a:solidFill>
               </a:defRPr>
             </a:pPr>
             <a:r>
-              <a:t>2) Se muestra el login.</a:t>
-            </a:r>
-          </a:p>
-          <a:p>
-            <a:pPr>
-              <a:defRPr sz="2000">
+              <a:t>gymmanager_app/__init__.py: crea la instancia principal de Flask.</a:t>
+            </a:r>
+          </a:p>
+          <a:p>
+            <a:pPr>
+              <a:defRPr sz="1900">
                 <a:solidFill>
                   <a:srgbClr val="F8FAFC"/>
                 </a:solidFill>
               </a:defRPr>
             </a:pPr>
             <a:r>
-              <a:t>3) Si las credenciales son correctas, accede al sistema.</a:t>
-            </a:r>
-          </a:p>
-          <a:p>
-            <a:pPr>
-              <a:defRPr sz="2000">
+              <a:t>gymmanager_app/routes.py: define rutas como login, inicio, alumnos y asistencia.</a:t>
+            </a:r>
+          </a:p>
+          <a:p>
+            <a:pPr>
+              <a:defRPr sz="1900">
                 <a:solidFill>
                   <a:srgbClr val="F8FAFC"/>
                 </a:solidFill>
               </a:defRPr>
             </a:pPr>
             <a:r>
-              <a:t>4) Puede gestionar alumnos, asistencia y rutinas.</a:t>
+              <a:t>gymmanager_app/data.py: lee y guarda información en archivos JSON.</a:t>
+            </a:r>
+          </a:p>
+          <a:p>
+            <a:pPr>
+              <a:defRPr sz="1900">
+                <a:solidFill>
+                  <a:srgbClr val="F8FAFC"/>
+                </a:solidFill>
+              </a:defRPr>
+            </a:pPr>
+            <a:r>
+              <a:t>Todo está separado por tareas para que sea más fácil de entender y mantener.</a:t>
             </a:r>
           </a:p>
         </p:txBody>
@@ -3830,7 +3951,7 @@
               </a:defRPr>
             </a:pPr>
             <a:r>
-              <a:t>5. ¿Qué pasa con los datos?</a:t>
+              <a:t>5. Cómo se conecta todo</a:t>
             </a:r>
           </a:p>
         </p:txBody>
@@ -3851,50 +3972,50 @@
           <a:lstStyle/>
           <a:p>
             <a:pPr>
-              <a:defRPr sz="2000">
+              <a:defRPr sz="1900">
                 <a:solidFill>
                   <a:srgbClr val="F8FAFC"/>
                 </a:solidFill>
               </a:defRPr>
             </a:pPr>
             <a:r>
-              <a:t>La información se guarda en archivos JSON.</a:t>
-            </a:r>
-          </a:p>
-          <a:p>
-            <a:pPr>
-              <a:defRPr sz="2000">
+              <a:t>1) El usuario abre una URL en el navegador.</a:t>
+            </a:r>
+          </a:p>
+          <a:p>
+            <a:pPr>
+              <a:defRPr sz="1900">
                 <a:solidFill>
                   <a:srgbClr val="F8FAFC"/>
                 </a:solidFill>
               </a:defRPr>
             </a:pPr>
             <a:r>
-              <a:t>alumnos.json: alumnos registrados.</a:t>
-            </a:r>
-          </a:p>
-          <a:p>
-            <a:pPr>
-              <a:defRPr sz="2000">
+              <a:t>2) Flask reconoce la ruta pedida.</a:t>
+            </a:r>
+          </a:p>
+          <a:p>
+            <a:pPr>
+              <a:defRPr sz="1900">
                 <a:solidFill>
                   <a:srgbClr val="F8FAFC"/>
                 </a:solidFill>
               </a:defRPr>
             </a:pPr>
             <a:r>
-              <a:t>rutinas.json: planes de entrenamiento.</a:t>
-            </a:r>
-          </a:p>
-          <a:p>
-            <a:pPr>
-              <a:defRPr sz="2000">
+              <a:t>3) La ruta llama a una función del código.</a:t>
+            </a:r>
+          </a:p>
+          <a:p>
+            <a:pPr>
+              <a:defRPr sz="1900">
                 <a:solidFill>
                   <a:srgbClr val="F8FAFC"/>
                 </a:solidFill>
               </a:defRPr>
             </a:pPr>
             <a:r>
-              <a:t>asistencia.json: seguimiento de presencia.</a:t>
+              <a:t>4) Esa función consulta o guarda información y devuelve una página HTML.</a:t>
             </a:r>
           </a:p>
         </p:txBody>
@@ -3948,7 +4069,7 @@
               </a:defRPr>
             </a:pPr>
             <a:r>
-              <a:t>6. Conclusión</a:t>
+              <a:t>6. Capturas de pantalla de la interfaz</a:t>
             </a:r>
           </a:p>
         </p:txBody>
@@ -3969,6 +4090,112 @@
           <a:lstStyle/>
           <a:p>
             <a:pPr>
+              <a:defRPr sz="1900">
+                <a:solidFill>
+                  <a:srgbClr val="F8FAFC"/>
+                </a:solidFill>
+              </a:defRPr>
+            </a:pPr>
+            <a:r>
+              <a:t>Se pueden incluir capturas del login, la pantalla de inicio y la lista de alumnos.</a:t>
+            </a:r>
+          </a:p>
+          <a:p>
+            <a:pPr>
+              <a:defRPr sz="1900">
+                <a:solidFill>
+                  <a:srgbClr val="F8FAFC"/>
+                </a:solidFill>
+              </a:defRPr>
+            </a:pPr>
+            <a:r>
+              <a:t>Estas imágenes ayudan a que la presentación sea más visual y fácil de entender.</a:t>
+            </a:r>
+          </a:p>
+          <a:p>
+            <a:pPr>
+              <a:defRPr sz="1900">
+                <a:solidFill>
+                  <a:srgbClr val="F8FAFC"/>
+                </a:solidFill>
+              </a:defRPr>
+            </a:pPr>
+            <a:r>
+              <a:t>Además, muestran cómo se ve la app desde la perspectiva del usuario final.</a:t>
+            </a:r>
+          </a:p>
+        </p:txBody>
+      </p:sp>
+    </p:spTree>
+  </p:cSld>
+  <p:clrMapOvr>
+    <a:masterClrMapping/>
+  </p:clrMapOvr>
+</p:sld>
+</file>
+
+<file path=ppt/slides/slide8.xml><?xml version="1.0" encoding="utf-8"?>
+<p:sld xmlns:a="http://schemas.openxmlformats.org/drawingml/2006/main" xmlns:p="http://schemas.openxmlformats.org/presentationml/2006/main" xmlns:r="http://schemas.openxmlformats.org/officeDocument/2006/relationships">
+  <p:cSld>
+    <p:bg>
+      <p:bgPr>
+        <a:solidFill>
+          <a:srgbClr val="0C162B"/>
+        </a:solidFill>
+        <a:effectLst/>
+      </p:bgPr>
+    </p:bg>
+    <p:spTree>
+      <p:nvGrpSpPr>
+        <p:cNvPr id="1" name=""/>
+        <p:cNvGrpSpPr/>
+        <p:nvPr/>
+      </p:nvGrpSpPr>
+      <p:grpSpPr/>
+      <p:sp>
+        <p:nvSpPr>
+          <p:cNvPr id="2" name="Title 1"/>
+          <p:cNvSpPr>
+            <a:spLocks noGrp="1"/>
+          </p:cNvSpPr>
+          <p:nvPr>
+            <p:ph type="title"/>
+          </p:nvPr>
+        </p:nvSpPr>
+        <p:spPr/>
+        <p:txBody>
+          <a:bodyPr/>
+          <a:lstStyle/>
+          <a:p>
+            <a:pPr>
+              <a:defRPr>
+                <a:solidFill>
+                  <a:srgbClr val="F472B6"/>
+                </a:solidFill>
+              </a:defRPr>
+            </a:pPr>
+            <a:r>
+              <a:t>7. Paso a paso: cómo funciona</a:t>
+            </a:r>
+          </a:p>
+        </p:txBody>
+      </p:sp>
+      <p:sp>
+        <p:nvSpPr>
+          <p:cNvPr id="3" name="Content Placeholder 2"/>
+          <p:cNvSpPr>
+            <a:spLocks noGrp="1"/>
+          </p:cNvSpPr>
+          <p:nvPr>
+            <p:ph idx="1"/>
+          </p:nvPr>
+        </p:nvSpPr>
+        <p:spPr/>
+        <p:txBody>
+          <a:bodyPr/>
+          <a:lstStyle/>
+          <a:p>
+            <a:pPr>
               <a:defRPr sz="2000">
                 <a:solidFill>
                   <a:srgbClr val="F8FAFC"/>
@@ -3976,7 +4203,7 @@
               </a:defRPr>
             </a:pPr>
             <a:r>
-              <a:t>GymManager es un ejemplo sencillo de cómo una idea real puede transformarse en una aplicación web.</a:t>
+              <a:t>1) El usuario entra a la aplicación.</a:t>
             </a:r>
           </a:p>
           <a:p>
@@ -3988,7 +4215,7 @@
               </a:defRPr>
             </a:pPr>
             <a:r>
-              <a:t>Se combina lógica, diseño y organización de información.</a:t>
+              <a:t>2) Se muestra el login.</a:t>
             </a:r>
           </a:p>
           <a:p>
@@ -4000,7 +4227,137 @@
               </a:defRPr>
             </a:pPr>
             <a:r>
-              <a:t>Es una buena forma de comprender cómo se construyen proyectos de software.</a:t>
+              <a:t>3) Si las credenciales son correctas, accede al sistema.</a:t>
+            </a:r>
+          </a:p>
+          <a:p>
+            <a:pPr>
+              <a:defRPr sz="2000">
+                <a:solidFill>
+                  <a:srgbClr val="F8FAFC"/>
+                </a:solidFill>
+              </a:defRPr>
+            </a:pPr>
+            <a:r>
+              <a:t>4) Puede gestionar alumnos, asistencia y rutinas.</a:t>
+            </a:r>
+          </a:p>
+        </p:txBody>
+      </p:sp>
+    </p:spTree>
+  </p:cSld>
+  <p:clrMapOvr>
+    <a:masterClrMapping/>
+  </p:clrMapOvr>
+</p:sld>
+</file>
+
+<file path=ppt/slides/slide9.xml><?xml version="1.0" encoding="utf-8"?>
+<p:sld xmlns:a="http://schemas.openxmlformats.org/drawingml/2006/main" xmlns:p="http://schemas.openxmlformats.org/presentationml/2006/main" xmlns:r="http://schemas.openxmlformats.org/officeDocument/2006/relationships">
+  <p:cSld>
+    <p:bg>
+      <p:bgPr>
+        <a:solidFill>
+          <a:srgbClr val="0C162B"/>
+        </a:solidFill>
+        <a:effectLst/>
+      </p:bgPr>
+    </p:bg>
+    <p:spTree>
+      <p:nvGrpSpPr>
+        <p:cNvPr id="1" name=""/>
+        <p:cNvGrpSpPr/>
+        <p:nvPr/>
+      </p:nvGrpSpPr>
+      <p:grpSpPr/>
+      <p:sp>
+        <p:nvSpPr>
+          <p:cNvPr id="2" name="Title 1"/>
+          <p:cNvSpPr>
+            <a:spLocks noGrp="1"/>
+          </p:cNvSpPr>
+          <p:nvPr>
+            <p:ph type="title"/>
+          </p:nvPr>
+        </p:nvSpPr>
+        <p:spPr/>
+        <p:txBody>
+          <a:bodyPr/>
+          <a:lstStyle/>
+          <a:p>
+            <a:pPr>
+              <a:defRPr>
+                <a:solidFill>
+                  <a:srgbClr val="F472B6"/>
+                </a:solidFill>
+              </a:defRPr>
+            </a:pPr>
+            <a:r>
+              <a:t>5. ¿Qué pasa con los datos?</a:t>
+            </a:r>
+          </a:p>
+        </p:txBody>
+      </p:sp>
+      <p:sp>
+        <p:nvSpPr>
+          <p:cNvPr id="3" name="Content Placeholder 2"/>
+          <p:cNvSpPr>
+            <a:spLocks noGrp="1"/>
+          </p:cNvSpPr>
+          <p:nvPr>
+            <p:ph idx="1"/>
+          </p:nvPr>
+        </p:nvSpPr>
+        <p:spPr/>
+        <p:txBody>
+          <a:bodyPr/>
+          <a:lstStyle/>
+          <a:p>
+            <a:pPr>
+              <a:defRPr sz="2000">
+                <a:solidFill>
+                  <a:srgbClr val="F8FAFC"/>
+                </a:solidFill>
+              </a:defRPr>
+            </a:pPr>
+            <a:r>
+              <a:t>La información se guarda en archivos JSON.</a:t>
+            </a:r>
+          </a:p>
+          <a:p>
+            <a:pPr>
+              <a:defRPr sz="2000">
+                <a:solidFill>
+                  <a:srgbClr val="F8FAFC"/>
+                </a:solidFill>
+              </a:defRPr>
+            </a:pPr>
+            <a:r>
+              <a:t>alumnos.json: alumnos registrados.</a:t>
+            </a:r>
+          </a:p>
+          <a:p>
+            <a:pPr>
+              <a:defRPr sz="2000">
+                <a:solidFill>
+                  <a:srgbClr val="F8FAFC"/>
+                </a:solidFill>
+              </a:defRPr>
+            </a:pPr>
+            <a:r>
+              <a:t>rutinas.json: planes de entrenamiento.</a:t>
+            </a:r>
+          </a:p>
+          <a:p>
+            <a:pPr>
+              <a:defRPr sz="2000">
+                <a:solidFill>
+                  <a:srgbClr val="F8FAFC"/>
+                </a:solidFill>
+              </a:defRPr>
+            </a:pPr>
+            <a:r>
+              <a:t>asistencia.json: seguimiento de presencia.</a:t>
             </a:r>
           </a:p>
         </p:txBody>

--- a/presentacion/gymmanager_presentacion.pptx
+++ b/presentacion/gymmanager_presentacion.pptx
@@ -3731,7 +3731,7 @@
               </a:defRPr>
             </a:pPr>
             <a:r>
-              <a:t>app.py: inicia la aplicación.</a:t>
+              <a:t>app.py: inicia la aplicación y levanta el servidor.</a:t>
             </a:r>
           </a:p>
           <a:p>
@@ -3743,7 +3743,7 @@
               </a:defRPr>
             </a:pPr>
             <a:r>
-              <a:t>templates/: contiene las páginas HTML.</a:t>
+              <a:t>gymmanager_app/: guarda la lógica principal del proyecto.</a:t>
             </a:r>
           </a:p>
           <a:p>
@@ -3755,7 +3755,7 @@
               </a:defRPr>
             </a:pPr>
             <a:r>
-              <a:t>static/: contiene CSS, videos e imágenes.</a:t>
+              <a:t>templates/: contiene las páginas HTML que se muestran al usuario.</a:t>
             </a:r>
           </a:p>
           <a:p>
@@ -3767,7 +3767,19 @@
               </a:defRPr>
             </a:pPr>
             <a:r>
-              <a:t>gymmanager_app/: guarda la lógica y las rutas de la app.</a:t>
+              <a:t>static/: guarda estilos, videos e imágenes.</a:t>
+            </a:r>
+          </a:p>
+          <a:p>
+            <a:pPr>
+              <a:defRPr sz="2000">
+                <a:solidFill>
+                  <a:srgbClr val="F8FAFC"/>
+                </a:solidFill>
+              </a:defRPr>
+            </a:pPr>
+            <a:r>
+              <a:t>Todo está estructurado para separar la interfaz, la lógica y los datos.</a:t>
             </a:r>
           </a:p>
         </p:txBody>
@@ -3842,19 +3854,19 @@
           <a:lstStyle/>
           <a:p>
             <a:pPr>
-              <a:defRPr sz="1900">
+              <a:defRPr sz="1800">
                 <a:solidFill>
                   <a:srgbClr val="F8FAFC"/>
                 </a:solidFill>
               </a:defRPr>
             </a:pPr>
             <a:r>
-              <a:t>app.py: prende la aplicación y define el puerto.</a:t>
-            </a:r>
-          </a:p>
-          <a:p>
-            <a:pPr>
-              <a:defRPr sz="1900">
+              <a:t>app.py: archivo principal que arranca la app.</a:t>
+            </a:r>
+          </a:p>
+          <a:p>
+            <a:pPr>
+              <a:defRPr sz="1800">
                 <a:solidFill>
                   <a:srgbClr val="F8FAFC"/>
                 </a:solidFill>
@@ -3866,38 +3878,50 @@
           </a:p>
           <a:p>
             <a:pPr>
-              <a:defRPr sz="1900">
+              <a:defRPr sz="1800">
                 <a:solidFill>
                   <a:srgbClr val="F8FAFC"/>
                 </a:solidFill>
               </a:defRPr>
             </a:pPr>
             <a:r>
-              <a:t>gymmanager_app/routes.py: define rutas como login, inicio, alumnos y asistencia.</a:t>
-            </a:r>
-          </a:p>
-          <a:p>
-            <a:pPr>
-              <a:defRPr sz="1900">
+              <a:t>gymmanager_app/config.py: guarda la configuración general del proyecto.</a:t>
+            </a:r>
+          </a:p>
+          <a:p>
+            <a:pPr>
+              <a:defRPr sz="1800">
                 <a:solidFill>
                   <a:srgbClr val="F8FAFC"/>
                 </a:solidFill>
               </a:defRPr>
             </a:pPr>
             <a:r>
+              <a:t>gymmanager_app/routes.py: define las rutas de login, inicio, alumnos y asistencia.</a:t>
+            </a:r>
+          </a:p>
+          <a:p>
+            <a:pPr>
+              <a:defRPr sz="1800">
+                <a:solidFill>
+                  <a:srgbClr val="F8FAFC"/>
+                </a:solidFill>
+              </a:defRPr>
+            </a:pPr>
+            <a:r>
               <a:t>gymmanager_app/data.py: lee y guarda información en archivos JSON.</a:t>
             </a:r>
           </a:p>
           <a:p>
             <a:pPr>
-              <a:defRPr sz="1900">
+              <a:defRPr sz="1800">
                 <a:solidFill>
                   <a:srgbClr val="F8FAFC"/>
                 </a:solidFill>
               </a:defRPr>
             </a:pPr>
             <a:r>
-              <a:t>Todo está separado por tareas para que sea más fácil de entender y mantener.</a:t>
+              <a:t>La separación por archivos ayuda a mantener el código más ordenado y fácil de entender.</a:t>
             </a:r>
           </a:p>
         </p:txBody>
